--- a/Nuclear_Fuel_Performance/NE533_Spring2026/Module1/Lec5_numerics.pptx
+++ b/Nuclear_Fuel_Performance/NE533_Spring2026/Module1/Lec5_numerics.pptx
@@ -6,18 +6,19 @@
   </p:sldMasterIdLst>
   <p:sldIdLst>
     <p:sldId id="282" r:id="rId2"/>
-    <p:sldId id="421" r:id="rId3"/>
-    <p:sldId id="291" r:id="rId4"/>
-    <p:sldId id="293" r:id="rId5"/>
-    <p:sldId id="294" r:id="rId6"/>
-    <p:sldId id="295" r:id="rId7"/>
-    <p:sldId id="292" r:id="rId8"/>
-    <p:sldId id="408" r:id="rId9"/>
-    <p:sldId id="407" r:id="rId10"/>
-    <p:sldId id="409" r:id="rId11"/>
-    <p:sldId id="410" r:id="rId12"/>
-    <p:sldId id="411" r:id="rId13"/>
-    <p:sldId id="549" r:id="rId14"/>
+    <p:sldId id="550" r:id="rId3"/>
+    <p:sldId id="421" r:id="rId4"/>
+    <p:sldId id="291" r:id="rId5"/>
+    <p:sldId id="293" r:id="rId6"/>
+    <p:sldId id="294" r:id="rId7"/>
+    <p:sldId id="295" r:id="rId8"/>
+    <p:sldId id="292" r:id="rId9"/>
+    <p:sldId id="408" r:id="rId10"/>
+    <p:sldId id="407" r:id="rId11"/>
+    <p:sldId id="409" r:id="rId12"/>
+    <p:sldId id="410" r:id="rId13"/>
+    <p:sldId id="411" r:id="rId14"/>
+    <p:sldId id="549" r:id="rId15"/>
   </p:sldIdLst>
   <p:sldSz cx="12192000" cy="6858000"/>
   <p:notesSz cx="6858000" cy="9144000"/>
@@ -319,7 +320,7 @@
               <a:pPr>
                 <a:defRPr/>
               </a:pPr>
-              <a:t>1/22/26</a:t>
+              <a:t>1/27/26</a:t>
             </a:fld>
             <a:endParaRPr lang="en-US"/>
           </a:p>
@@ -515,7 +516,7 @@
               <a:pPr>
                 <a:defRPr/>
               </a:pPr>
-              <a:t>1/22/26</a:t>
+              <a:t>1/27/26</a:t>
             </a:fld>
             <a:endParaRPr lang="en-US"/>
           </a:p>
@@ -720,7 +721,7 @@
               <a:pPr>
                 <a:defRPr/>
               </a:pPr>
-              <a:t>1/22/26</a:t>
+              <a:t>1/27/26</a:t>
             </a:fld>
             <a:endParaRPr lang="en-US"/>
           </a:p>
@@ -940,7 +941,7 @@
               <a:pPr>
                 <a:defRPr/>
               </a:pPr>
-              <a:t>1/22/26</a:t>
+              <a:t>1/27/26</a:t>
             </a:fld>
             <a:endParaRPr lang="en-US"/>
           </a:p>
@@ -1213,7 +1214,7 @@
               <a:pPr>
                 <a:defRPr/>
               </a:pPr>
-              <a:t>1/22/26</a:t>
+              <a:t>1/27/26</a:t>
             </a:fld>
             <a:endParaRPr lang="en-US"/>
           </a:p>
@@ -1446,7 +1447,7 @@
               <a:pPr>
                 <a:defRPr/>
               </a:pPr>
-              <a:t>1/22/26</a:t>
+              <a:t>1/27/26</a:t>
             </a:fld>
             <a:endParaRPr lang="en-US"/>
           </a:p>
@@ -1683,7 +1684,7 @@
               <a:pPr>
                 <a:defRPr/>
               </a:pPr>
-              <a:t>1/22/26</a:t>
+              <a:t>1/27/26</a:t>
             </a:fld>
             <a:endParaRPr lang="en-US"/>
           </a:p>
@@ -1831,7 +1832,7 @@
               <a:pPr>
                 <a:defRPr/>
               </a:pPr>
-              <a:t>1/22/26</a:t>
+              <a:t>1/27/26</a:t>
             </a:fld>
             <a:endParaRPr lang="en-US"/>
           </a:p>
@@ -1953,7 +1954,7 @@
               <a:pPr>
                 <a:defRPr/>
               </a:pPr>
-              <a:t>1/22/26</a:t>
+              <a:t>1/27/26</a:t>
             </a:fld>
             <a:endParaRPr lang="en-US"/>
           </a:p>
@@ -2255,7 +2256,7 @@
               <a:pPr>
                 <a:defRPr/>
               </a:pPr>
-              <a:t>1/22/26</a:t>
+              <a:t>1/27/26</a:t>
             </a:fld>
             <a:endParaRPr lang="en-US"/>
           </a:p>
@@ -2542,7 +2543,7 @@
               <a:pPr>
                 <a:defRPr/>
               </a:pPr>
-              <a:t>1/22/26</a:t>
+              <a:t>1/27/26</a:t>
             </a:fld>
             <a:endParaRPr lang="en-US"/>
           </a:p>
@@ -2666,14 +2667,14 @@
           </a:ln>
           <a:extLst>
             <a:ext uri="{909E8E84-426E-40dd-AFC4-6F175D3DCCD1}">
-              <a14:hiddenFill xmlns="" xmlns:a14="http://schemas.microsoft.com/office/drawing/2010/main">
+              <a14:hiddenFill xmlns:a14="http://schemas.microsoft.com/office/drawing/2010/main" xmlns="">
                 <a:solidFill>
                   <a:srgbClr val="FFFFFF"/>
                 </a:solidFill>
               </a14:hiddenFill>
             </a:ext>
             <a:ext uri="{91240B29-F687-4f45-9708-019B960494DF}">
-              <a14:hiddenLine xmlns="" xmlns:a14="http://schemas.microsoft.com/office/drawing/2010/main" w="9525">
+              <a14:hiddenLine xmlns:a14="http://schemas.microsoft.com/office/drawing/2010/main" xmlns="" w="9525">
                 <a:solidFill>
                   <a:srgbClr val="000000"/>
                 </a:solidFill>
@@ -2683,7 +2684,7 @@
               </a14:hiddenLine>
             </a:ext>
             <a:ext uri="{FAA26D3D-D897-4be2-8F04-BA451C77F1D7}">
-              <ma14:placeholderFlag xmlns="" xmlns:ma14="http://schemas.microsoft.com/office/mac/drawingml/2011/main" val="1"/>
+              <ma14:placeholderFlag xmlns:ma14="http://schemas.microsoft.com/office/mac/drawingml/2011/main" xmlns="" val="1"/>
             </a:ext>
           </a:extLst>
         </p:spPr>
@@ -2734,14 +2735,14 @@
           </a:ln>
           <a:extLst>
             <a:ext uri="{909E8E84-426E-40dd-AFC4-6F175D3DCCD1}">
-              <a14:hiddenFill xmlns="" xmlns:a14="http://schemas.microsoft.com/office/drawing/2010/main">
+              <a14:hiddenFill xmlns:a14="http://schemas.microsoft.com/office/drawing/2010/main" xmlns="">
                 <a:solidFill>
                   <a:srgbClr val="FFFFFF"/>
                 </a:solidFill>
               </a14:hiddenFill>
             </a:ext>
             <a:ext uri="{91240B29-F687-4f45-9708-019B960494DF}">
-              <a14:hiddenLine xmlns="" xmlns:a14="http://schemas.microsoft.com/office/drawing/2010/main" w="9525">
+              <a14:hiddenLine xmlns:a14="http://schemas.microsoft.com/office/drawing/2010/main" xmlns="" w="9525">
                 <a:solidFill>
                   <a:srgbClr val="000000"/>
                 </a:solidFill>
@@ -2751,7 +2752,7 @@
               </a14:hiddenLine>
             </a:ext>
             <a:ext uri="{FAA26D3D-D897-4be2-8F04-BA451C77F1D7}">
-              <ma14:placeholderFlag xmlns="" xmlns:ma14="http://schemas.microsoft.com/office/mac/drawingml/2011/main" val="1"/>
+              <ma14:placeholderFlag xmlns:ma14="http://schemas.microsoft.com/office/mac/drawingml/2011/main" xmlns="" val="1"/>
             </a:ext>
           </a:extLst>
         </p:spPr>
@@ -2850,7 +2851,7 @@
               <a:pPr>
                 <a:defRPr/>
               </a:pPr>
-              <a:t>1/22/26</a:t>
+              <a:t>1/27/26</a:t>
             </a:fld>
             <a:endParaRPr lang="en-US" dirty="0"/>
           </a:p>
@@ -3600,6 +3601,545 @@
       </p:grpSpPr>
       <p:sp>
         <p:nvSpPr>
+          <p:cNvPr id="2" name="Title 1"/>
+          <p:cNvSpPr>
+            <a:spLocks noGrp="1"/>
+          </p:cNvSpPr>
+          <p:nvPr>
+            <p:ph type="title"/>
+          </p:nvPr>
+        </p:nvSpPr>
+        <p:spPr/>
+        <p:txBody>
+          <a:bodyPr/>
+          <a:lstStyle/>
+          <a:p>
+            <a:r>
+              <a:rPr lang="en-US" dirty="0"/>
+              <a:t>Numerical Approaches to Different Fuel Performance Problems</a:t>
+            </a:r>
+          </a:p>
+        </p:txBody>
+      </p:sp>
+      <p:sp>
+        <p:nvSpPr>
+          <p:cNvPr id="3" name="Pentagon 2"/>
+          <p:cNvSpPr/>
+          <p:nvPr/>
+        </p:nvSpPr>
+        <p:spPr>
+          <a:xfrm rot="16200000">
+            <a:off x="-198665" y="3771515"/>
+            <a:ext cx="4359729" cy="580572"/>
+          </a:xfrm>
+          <a:prstGeom prst="homePlate">
+            <a:avLst/>
+          </a:prstGeom>
+          <a:gradFill>
+            <a:lin ang="0" scaled="0"/>
+          </a:gradFill>
+        </p:spPr>
+        <p:style>
+          <a:lnRef idx="1">
+            <a:schemeClr val="accent2"/>
+          </a:lnRef>
+          <a:fillRef idx="3">
+            <a:schemeClr val="accent2"/>
+          </a:fillRef>
+          <a:effectRef idx="2">
+            <a:schemeClr val="accent2"/>
+          </a:effectRef>
+          <a:fontRef idx="minor">
+            <a:schemeClr val="lt1"/>
+          </a:fontRef>
+        </p:style>
+        <p:txBody>
+          <a:bodyPr rtlCol="0" anchor="ctr"/>
+          <a:lstStyle/>
+          <a:p>
+            <a:pPr algn="ctr"/>
+            <a:r>
+              <a:rPr lang="en-US" dirty="0"/>
+              <a:t>Computational cost</a:t>
+            </a:r>
+          </a:p>
+        </p:txBody>
+      </p:sp>
+      <p:sp>
+        <p:nvSpPr>
+          <p:cNvPr id="4" name="Pentagon 3"/>
+          <p:cNvSpPr/>
+          <p:nvPr/>
+        </p:nvSpPr>
+        <p:spPr>
+          <a:xfrm rot="16200000">
+            <a:off x="7893958" y="3771514"/>
+            <a:ext cx="4359729" cy="580572"/>
+          </a:xfrm>
+          <a:prstGeom prst="homePlate">
+            <a:avLst/>
+          </a:prstGeom>
+          <a:gradFill>
+            <a:lin ang="0" scaled="0"/>
+          </a:gradFill>
+        </p:spPr>
+        <p:style>
+          <a:lnRef idx="1">
+            <a:schemeClr val="accent2"/>
+          </a:lnRef>
+          <a:fillRef idx="3">
+            <a:schemeClr val="accent2"/>
+          </a:fillRef>
+          <a:effectRef idx="2">
+            <a:schemeClr val="accent2"/>
+          </a:effectRef>
+          <a:fontRef idx="minor">
+            <a:schemeClr val="lt1"/>
+          </a:fontRef>
+        </p:style>
+        <p:txBody>
+          <a:bodyPr rtlCol="0" anchor="ctr"/>
+          <a:lstStyle/>
+          <a:p>
+            <a:pPr algn="ctr"/>
+            <a:r>
+              <a:rPr lang="en-US" dirty="0"/>
+              <a:t>Accuracy</a:t>
+            </a:r>
+          </a:p>
+        </p:txBody>
+      </p:sp>
+      <p:grpSp>
+        <p:nvGrpSpPr>
+          <p:cNvPr id="5" name="Group 4"/>
+          <p:cNvGrpSpPr/>
+          <p:nvPr/>
+        </p:nvGrpSpPr>
+        <p:grpSpPr>
+          <a:xfrm>
+            <a:off x="2186593" y="1881935"/>
+            <a:ext cx="7596943" cy="1175798"/>
+            <a:chOff x="662592" y="1881935"/>
+            <a:chExt cx="7596943" cy="1175798"/>
+          </a:xfrm>
+        </p:grpSpPr>
+        <p:pic>
+          <p:nvPicPr>
+            <p:cNvPr id="6" name="Picture 5"/>
+            <p:cNvPicPr>
+              <a:picLocks noChangeAspect="1"/>
+            </p:cNvPicPr>
+            <p:nvPr/>
+          </p:nvPicPr>
+          <p:blipFill>
+            <a:blip r:embed="rId2">
+              <a:alphaModFix amt="56000"/>
+              <a:extLst>
+                <a:ext uri="{28A0092B-C50C-407E-A947-70E740481C1C}">
+                  <a14:useLocalDpi xmlns:a14="http://schemas.microsoft.com/office/drawing/2010/main" val="0"/>
+                </a:ext>
+              </a:extLst>
+            </a:blip>
+            <a:stretch>
+              <a:fillRect/>
+            </a:stretch>
+          </p:blipFill>
+          <p:spPr>
+            <a:xfrm>
+              <a:off x="662592" y="1881935"/>
+              <a:ext cx="7426552" cy="1175798"/>
+            </a:xfrm>
+            <a:prstGeom prst="rect">
+              <a:avLst/>
+            </a:prstGeom>
+            <a:ln>
+              <a:noFill/>
+            </a:ln>
+            <a:effectLst>
+              <a:outerShdw blurRad="292100" dist="139700" dir="2700000" algn="tl" rotWithShape="0">
+                <a:srgbClr val="333333">
+                  <a:alpha val="65000"/>
+                </a:srgbClr>
+              </a:outerShdw>
+            </a:effectLst>
+          </p:spPr>
+        </p:pic>
+        <p:sp>
+          <p:nvSpPr>
+            <p:cNvPr id="7" name="TextBox 6"/>
+            <p:cNvSpPr txBox="1"/>
+            <p:nvPr/>
+          </p:nvSpPr>
+          <p:spPr>
+            <a:xfrm>
+              <a:off x="747487" y="2263761"/>
+              <a:ext cx="7512048" cy="738664"/>
+            </a:xfrm>
+            <a:prstGeom prst="rect">
+              <a:avLst/>
+            </a:prstGeom>
+            <a:noFill/>
+          </p:spPr>
+          <p:txBody>
+            <a:bodyPr wrap="square" rtlCol="0">
+              <a:spAutoFit/>
+            </a:bodyPr>
+            <a:lstStyle/>
+            <a:p>
+              <a:pPr algn="ctr"/>
+              <a:r>
+                <a:rPr lang="en-US" sz="2400" b="1" dirty="0"/>
+                <a:t>Transient, full 3D</a:t>
+              </a:r>
+            </a:p>
+            <a:p>
+              <a:pPr algn="ctr"/>
+              <a:r>
+                <a:rPr lang="en-US" b="1" i="1" dirty="0">
+                  <a:solidFill>
+                    <a:srgbClr val="3154CA"/>
+                  </a:solidFill>
+                </a:rPr>
+                <a:t>FEM or FV</a:t>
+              </a:r>
+            </a:p>
+          </p:txBody>
+        </p:sp>
+      </p:grpSp>
+      <p:grpSp>
+        <p:nvGrpSpPr>
+          <p:cNvPr id="8" name="Group 7"/>
+          <p:cNvGrpSpPr/>
+          <p:nvPr/>
+        </p:nvGrpSpPr>
+        <p:grpSpPr>
+          <a:xfrm>
+            <a:off x="2271486" y="3138120"/>
+            <a:ext cx="7512048" cy="895746"/>
+            <a:chOff x="747486" y="3138120"/>
+            <a:chExt cx="7512048" cy="895746"/>
+          </a:xfrm>
+        </p:grpSpPr>
+        <p:pic>
+          <p:nvPicPr>
+            <p:cNvPr id="9" name="Picture 8" descr="2D_asisymmetric_discrete_pellet.png"/>
+            <p:cNvPicPr>
+              <a:picLocks noChangeAspect="1"/>
+            </p:cNvPicPr>
+            <p:nvPr/>
+          </p:nvPicPr>
+          <p:blipFill>
+            <a:blip r:embed="rId3">
+              <a:alphaModFix amt="60000"/>
+              <a:extLst>
+                <a:ext uri="{28A0092B-C50C-407E-A947-70E740481C1C}">
+                  <a14:useLocalDpi xmlns:a14="http://schemas.microsoft.com/office/drawing/2010/main" val="0"/>
+                </a:ext>
+              </a:extLst>
+            </a:blip>
+            <a:stretch>
+              <a:fillRect/>
+            </a:stretch>
+          </p:blipFill>
+          <p:spPr>
+            <a:xfrm>
+              <a:off x="834578" y="3138120"/>
+              <a:ext cx="7420806" cy="427052"/>
+            </a:xfrm>
+            <a:prstGeom prst="rect">
+              <a:avLst/>
+            </a:prstGeom>
+          </p:spPr>
+        </p:pic>
+        <p:sp>
+          <p:nvSpPr>
+            <p:cNvPr id="10" name="TextBox 9"/>
+            <p:cNvSpPr txBox="1"/>
+            <p:nvPr/>
+          </p:nvSpPr>
+          <p:spPr>
+            <a:xfrm>
+              <a:off x="747486" y="3202869"/>
+              <a:ext cx="7512048" cy="830997"/>
+            </a:xfrm>
+            <a:prstGeom prst="rect">
+              <a:avLst/>
+            </a:prstGeom>
+            <a:noFill/>
+          </p:spPr>
+          <p:txBody>
+            <a:bodyPr wrap="square" rtlCol="0">
+              <a:spAutoFit/>
+            </a:bodyPr>
+            <a:lstStyle/>
+            <a:p>
+              <a:pPr algn="ctr"/>
+              <a:r>
+                <a:rPr lang="en-US" sz="2400" b="1" dirty="0"/>
+                <a:t>Transient, 2D axisymmetric with discrete pellets</a:t>
+              </a:r>
+            </a:p>
+            <a:p>
+              <a:pPr algn="ctr"/>
+              <a:r>
+                <a:rPr lang="en-US" b="1" i="1" dirty="0">
+                  <a:solidFill>
+                    <a:srgbClr val="3154CA"/>
+                  </a:solidFill>
+                </a:rPr>
+                <a:t>FEM or FV</a:t>
+              </a:r>
+              <a:r>
+                <a:rPr lang="en-US" sz="2400" b="1" dirty="0">
+                  <a:solidFill>
+                    <a:srgbClr val="3154CA"/>
+                  </a:solidFill>
+                </a:rPr>
+                <a:t> </a:t>
+              </a:r>
+            </a:p>
+          </p:txBody>
+        </p:sp>
+      </p:grpSp>
+      <p:grpSp>
+        <p:nvGrpSpPr>
+          <p:cNvPr id="11" name="Group 10"/>
+          <p:cNvGrpSpPr/>
+          <p:nvPr/>
+        </p:nvGrpSpPr>
+        <p:grpSpPr>
+          <a:xfrm>
+            <a:off x="2271486" y="3868051"/>
+            <a:ext cx="7512048" cy="830997"/>
+            <a:chOff x="747486" y="3868050"/>
+            <a:chExt cx="7512048" cy="830997"/>
+          </a:xfrm>
+        </p:grpSpPr>
+        <p:pic>
+          <p:nvPicPr>
+            <p:cNvPr id="12" name="Picture 11" descr="2D_asisymmetric_smeared_pellet.png"/>
+            <p:cNvPicPr>
+              <a:picLocks noChangeAspect="1"/>
+            </p:cNvPicPr>
+            <p:nvPr/>
+          </p:nvPicPr>
+          <p:blipFill>
+            <a:blip r:embed="rId4">
+              <a:alphaModFix amt="60000"/>
+              <a:extLst>
+                <a:ext uri="{28A0092B-C50C-407E-A947-70E740481C1C}">
+                  <a14:useLocalDpi xmlns:a14="http://schemas.microsoft.com/office/drawing/2010/main" val="0"/>
+                </a:ext>
+              </a:extLst>
+            </a:blip>
+            <a:stretch>
+              <a:fillRect/>
+            </a:stretch>
+          </p:blipFill>
+          <p:spPr>
+            <a:xfrm>
+              <a:off x="834578" y="3956978"/>
+              <a:ext cx="7320636" cy="417458"/>
+            </a:xfrm>
+            <a:prstGeom prst="rect">
+              <a:avLst/>
+            </a:prstGeom>
+          </p:spPr>
+        </p:pic>
+        <p:sp>
+          <p:nvSpPr>
+            <p:cNvPr id="13" name="TextBox 12"/>
+            <p:cNvSpPr txBox="1"/>
+            <p:nvPr/>
+          </p:nvSpPr>
+          <p:spPr>
+            <a:xfrm>
+              <a:off x="747486" y="3868050"/>
+              <a:ext cx="7512048" cy="830997"/>
+            </a:xfrm>
+            <a:prstGeom prst="rect">
+              <a:avLst/>
+            </a:prstGeom>
+            <a:noFill/>
+          </p:spPr>
+          <p:txBody>
+            <a:bodyPr wrap="square" rtlCol="0">
+              <a:spAutoFit/>
+            </a:bodyPr>
+            <a:lstStyle/>
+            <a:p>
+              <a:pPr algn="ctr"/>
+              <a:r>
+                <a:rPr lang="en-US" sz="2400" b="1" dirty="0"/>
+                <a:t>Transient, 2D axisymmetric with smeared pellets</a:t>
+              </a:r>
+            </a:p>
+            <a:p>
+              <a:pPr algn="ctr"/>
+              <a:r>
+                <a:rPr lang="en-US" b="1" i="1" dirty="0">
+                  <a:solidFill>
+                    <a:srgbClr val="3154CA"/>
+                  </a:solidFill>
+                </a:rPr>
+                <a:t>FEM, FV, or FD</a:t>
+              </a:r>
+              <a:r>
+                <a:rPr lang="en-US" sz="2400" b="1" dirty="0">
+                  <a:solidFill>
+                    <a:srgbClr val="3154CA"/>
+                  </a:solidFill>
+                </a:rPr>
+                <a:t> </a:t>
+              </a:r>
+            </a:p>
+          </p:txBody>
+        </p:sp>
+      </p:grpSp>
+      <p:sp>
+        <p:nvSpPr>
+          <p:cNvPr id="14" name="TextBox 13"/>
+          <p:cNvSpPr txBox="1"/>
+          <p:nvPr/>
+        </p:nvSpPr>
+        <p:spPr>
+          <a:xfrm>
+            <a:off x="2271487" y="4594014"/>
+            <a:ext cx="7512048" cy="738664"/>
+          </a:xfrm>
+          <a:prstGeom prst="rect">
+            <a:avLst/>
+          </a:prstGeom>
+          <a:noFill/>
+        </p:spPr>
+        <p:txBody>
+          <a:bodyPr wrap="square" rtlCol="0">
+            <a:spAutoFit/>
+          </a:bodyPr>
+          <a:lstStyle/>
+          <a:p>
+            <a:pPr algn="ctr"/>
+            <a:r>
+              <a:rPr lang="en-US" sz="2400" b="1" dirty="0"/>
+              <a:t>Transient, multiple 1D slices (1.5D)</a:t>
+            </a:r>
+          </a:p>
+          <a:p>
+            <a:pPr algn="ctr"/>
+            <a:r>
+              <a:rPr lang="en-US" b="1" i="1" dirty="0">
+                <a:solidFill>
+                  <a:srgbClr val="3154CA"/>
+                </a:solidFill>
+              </a:rPr>
+              <a:t>FEM, FV, or FD</a:t>
+            </a:r>
+          </a:p>
+        </p:txBody>
+      </p:sp>
+      <p:sp>
+        <p:nvSpPr>
+          <p:cNvPr id="15" name="TextBox 14"/>
+          <p:cNvSpPr txBox="1"/>
+          <p:nvPr/>
+        </p:nvSpPr>
+        <p:spPr>
+          <a:xfrm>
+            <a:off x="2271487" y="5191336"/>
+            <a:ext cx="7512048" cy="738664"/>
+          </a:xfrm>
+          <a:prstGeom prst="rect">
+            <a:avLst/>
+          </a:prstGeom>
+          <a:noFill/>
+        </p:spPr>
+        <p:txBody>
+          <a:bodyPr wrap="square" rtlCol="0">
+            <a:spAutoFit/>
+          </a:bodyPr>
+          <a:lstStyle/>
+          <a:p>
+            <a:pPr algn="ctr"/>
+            <a:r>
+              <a:rPr lang="en-US" sz="2400" b="1" dirty="0"/>
+              <a:t>Transient, 1D</a:t>
+            </a:r>
+          </a:p>
+          <a:p>
+            <a:pPr algn="ctr"/>
+            <a:r>
+              <a:rPr lang="en-US" b="1" i="1" dirty="0">
+                <a:solidFill>
+                  <a:srgbClr val="3154CA"/>
+                </a:solidFill>
+              </a:rPr>
+              <a:t>FEM, FV, or FD</a:t>
+            </a:r>
+          </a:p>
+        </p:txBody>
+      </p:sp>
+      <p:sp>
+        <p:nvSpPr>
+          <p:cNvPr id="16" name="TextBox 15"/>
+          <p:cNvSpPr txBox="1"/>
+          <p:nvPr/>
+        </p:nvSpPr>
+        <p:spPr>
+          <a:xfrm>
+            <a:off x="2271486" y="5780002"/>
+            <a:ext cx="7512048" cy="461665"/>
+          </a:xfrm>
+          <a:prstGeom prst="rect">
+            <a:avLst/>
+          </a:prstGeom>
+          <a:noFill/>
+        </p:spPr>
+        <p:txBody>
+          <a:bodyPr wrap="square" rtlCol="0">
+            <a:spAutoFit/>
+          </a:bodyPr>
+          <a:lstStyle/>
+          <a:p>
+            <a:pPr algn="ctr"/>
+            <a:r>
+              <a:rPr lang="en-US" sz="2400" b="1" dirty="0"/>
+              <a:t>Steady state, 1D (analytical)</a:t>
+            </a:r>
+          </a:p>
+        </p:txBody>
+      </p:sp>
+    </p:spTree>
+    <p:extLst>
+      <p:ext uri="{BB962C8B-B14F-4D97-AF65-F5344CB8AC3E}">
+        <p14:creationId xmlns:p14="http://schemas.microsoft.com/office/powerpoint/2010/main" val="1629777620"/>
+      </p:ext>
+    </p:extLst>
+  </p:cSld>
+  <p:clrMapOvr>
+    <a:masterClrMapping/>
+  </p:clrMapOvr>
+</p:sld>
+</file>
+
+<file path=ppt/slides/slide11.xml><?xml version="1.0" encoding="utf-8"?>
+<p:sld xmlns:a="http://schemas.openxmlformats.org/drawingml/2006/main" xmlns:r="http://schemas.openxmlformats.org/officeDocument/2006/relationships" xmlns:p="http://schemas.openxmlformats.org/presentationml/2006/main">
+  <p:cSld>
+    <p:spTree>
+      <p:nvGrpSpPr>
+        <p:cNvPr id="1" name=""/>
+        <p:cNvGrpSpPr/>
+        <p:nvPr/>
+      </p:nvGrpSpPr>
+      <p:grpSpPr>
+        <a:xfrm>
+          <a:off x="0" y="0"/>
+          <a:ext cx="0" cy="0"/>
+          <a:chOff x="0" y="0"/>
+          <a:chExt cx="0" cy="0"/>
+        </a:xfrm>
+      </p:grpSpPr>
+      <p:sp>
+        <p:nvSpPr>
           <p:cNvPr id="2" name="Title 1">
             <a:extLst>
               <a:ext uri="{FF2B5EF4-FFF2-40B4-BE49-F238E27FC236}">
@@ -3655,7 +4195,7 @@
               <a:pPr>
                 <a:defRPr/>
               </a:pPr>
-              <a:t>10</a:t>
+              <a:t>11</a:t>
             </a:fld>
             <a:endParaRPr lang="en-US"/>
           </a:p>
@@ -4132,7 +4672,7 @@
 </p:sld>
 </file>
 
-<file path=ppt/slides/slide11.xml><?xml version="1.0" encoding="utf-8"?>
+<file path=ppt/slides/slide12.xml><?xml version="1.0" encoding="utf-8"?>
 <p:sld xmlns:a="http://schemas.openxmlformats.org/drawingml/2006/main" xmlns:r="http://schemas.openxmlformats.org/officeDocument/2006/relationships" xmlns:p="http://schemas.openxmlformats.org/presentationml/2006/main">
   <p:cSld>
     <p:spTree>
@@ -4262,7 +4802,7 @@
               <a:pPr>
                 <a:defRPr/>
               </a:pPr>
-              <a:t>11</a:t>
+              <a:t>12</a:t>
             </a:fld>
             <a:endParaRPr lang="en-US"/>
           </a:p>
@@ -4331,172 +4871,6 @@
 </p:sld>
 </file>
 
-<file path=ppt/slides/slide12.xml><?xml version="1.0" encoding="utf-8"?>
-<p:sld xmlns:a="http://schemas.openxmlformats.org/drawingml/2006/main" xmlns:r="http://schemas.openxmlformats.org/officeDocument/2006/relationships" xmlns:p="http://schemas.openxmlformats.org/presentationml/2006/main">
-  <p:cSld>
-    <p:spTree>
-      <p:nvGrpSpPr>
-        <p:cNvPr id="1" name=""/>
-        <p:cNvGrpSpPr/>
-        <p:nvPr/>
-      </p:nvGrpSpPr>
-      <p:grpSpPr>
-        <a:xfrm>
-          <a:off x="0" y="0"/>
-          <a:ext cx="0" cy="0"/>
-          <a:chOff x="0" y="0"/>
-          <a:chExt cx="0" cy="0"/>
-        </a:xfrm>
-      </p:grpSpPr>
-      <p:sp>
-        <p:nvSpPr>
-          <p:cNvPr id="2" name="Title 1">
-            <a:extLst>
-              <a:ext uri="{FF2B5EF4-FFF2-40B4-BE49-F238E27FC236}">
-                <a16:creationId xmlns:a16="http://schemas.microsoft.com/office/drawing/2014/main" id="{8CEC41D0-CD90-604D-9421-ABA9845A448D}"/>
-              </a:ext>
-            </a:extLst>
-          </p:cNvPr>
-          <p:cNvSpPr>
-            <a:spLocks noGrp="1"/>
-          </p:cNvSpPr>
-          <p:nvPr>
-            <p:ph type="title"/>
-          </p:nvPr>
-        </p:nvSpPr>
-        <p:spPr/>
-        <p:txBody>
-          <a:bodyPr/>
-          <a:lstStyle/>
-          <a:p>
-            <a:r>
-              <a:rPr lang="en-US" dirty="0"/>
-              <a:t>Summary</a:t>
-            </a:r>
-          </a:p>
-        </p:txBody>
-      </p:sp>
-      <p:sp>
-        <p:nvSpPr>
-          <p:cNvPr id="3" name="Content Placeholder 2">
-            <a:extLst>
-              <a:ext uri="{FF2B5EF4-FFF2-40B4-BE49-F238E27FC236}">
-                <a16:creationId xmlns:a16="http://schemas.microsoft.com/office/drawing/2014/main" id="{EF6ED727-E738-BB4E-9468-91EA4903D3C0}"/>
-              </a:ext>
-            </a:extLst>
-          </p:cNvPr>
-          <p:cNvSpPr>
-            <a:spLocks noGrp="1"/>
-          </p:cNvSpPr>
-          <p:nvPr>
-            <p:ph idx="1"/>
-          </p:nvPr>
-        </p:nvSpPr>
-        <p:spPr/>
-        <p:txBody>
-          <a:bodyPr/>
-          <a:lstStyle/>
-          <a:p>
-            <a:r>
-              <a:rPr lang="en-US" dirty="0"/>
-              <a:t>The heat equation can be solved using numerical methods</a:t>
-            </a:r>
-          </a:p>
-          <a:p>
-            <a:r>
-              <a:rPr lang="en-US" dirty="0"/>
-              <a:t>Explicit or implicit time integration can be used</a:t>
-            </a:r>
-          </a:p>
-          <a:p>
-            <a:r>
-              <a:rPr lang="en-US" dirty="0"/>
-              <a:t>Spatial derivative solution methods divide the domain up into smaller pieces</a:t>
-            </a:r>
-          </a:p>
-          <a:p>
-            <a:pPr lvl="1"/>
-            <a:r>
-              <a:rPr lang="en-US" dirty="0"/>
-              <a:t>Finite difference</a:t>
-            </a:r>
-          </a:p>
-          <a:p>
-            <a:pPr lvl="1"/>
-            <a:r>
-              <a:rPr lang="en-US" dirty="0"/>
-              <a:t>Finite volume</a:t>
-            </a:r>
-          </a:p>
-          <a:p>
-            <a:pPr lvl="1"/>
-            <a:r>
-              <a:rPr lang="en-US" dirty="0"/>
-              <a:t>Finite element</a:t>
-            </a:r>
-          </a:p>
-          <a:p>
-            <a:r>
-              <a:rPr lang="en-US" dirty="0"/>
-              <a:t>Each discretization has strengths/weaknesses</a:t>
-            </a:r>
-          </a:p>
-          <a:p>
-            <a:r>
-              <a:rPr lang="en-US" dirty="0"/>
-              <a:t>Finite element is primary method for high fidelity fuel performance codes</a:t>
-            </a:r>
-          </a:p>
-        </p:txBody>
-      </p:sp>
-      <p:sp>
-        <p:nvSpPr>
-          <p:cNvPr id="4" name="Slide Number Placeholder 3">
-            <a:extLst>
-              <a:ext uri="{FF2B5EF4-FFF2-40B4-BE49-F238E27FC236}">
-                <a16:creationId xmlns:a16="http://schemas.microsoft.com/office/drawing/2014/main" id="{4CC3667D-0DF5-C145-A246-FEF9A6035D17}"/>
-              </a:ext>
-            </a:extLst>
-          </p:cNvPr>
-          <p:cNvSpPr>
-            <a:spLocks noGrp="1"/>
-          </p:cNvSpPr>
-          <p:nvPr>
-            <p:ph type="sldNum" sz="quarter" idx="12"/>
-          </p:nvPr>
-        </p:nvSpPr>
-        <p:spPr/>
-        <p:txBody>
-          <a:bodyPr/>
-          <a:lstStyle/>
-          <a:p>
-            <a:pPr>
-              <a:defRPr/>
-            </a:pPr>
-            <a:fld id="{3FF2C605-4958-CF43-AA48-80339EFDB0AF}" type="slidenum">
-              <a:rPr lang="en-US" smtClean="0"/>
-              <a:pPr>
-                <a:defRPr/>
-              </a:pPr>
-              <a:t>12</a:t>
-            </a:fld>
-            <a:endParaRPr lang="en-US"/>
-          </a:p>
-        </p:txBody>
-      </p:sp>
-    </p:spTree>
-    <p:extLst>
-      <p:ext uri="{BB962C8B-B14F-4D97-AF65-F5344CB8AC3E}">
-        <p14:creationId xmlns:p14="http://schemas.microsoft.com/office/powerpoint/2010/main" val="817537717"/>
-      </p:ext>
-    </p:extLst>
-  </p:cSld>
-  <p:clrMapOvr>
-    <a:masterClrMapping/>
-  </p:clrMapOvr>
-</p:sld>
-</file>
-
 <file path=ppt/slides/slide13.xml><?xml version="1.0" encoding="utf-8"?>
 <p:sld xmlns:a="http://schemas.openxmlformats.org/drawingml/2006/main" xmlns:r="http://schemas.openxmlformats.org/officeDocument/2006/relationships" xmlns:p="http://schemas.openxmlformats.org/presentationml/2006/main">
   <p:cSld>
@@ -4519,6 +4893,172 @@
           <p:cNvPr id="2" name="Title 1">
             <a:extLst>
               <a:ext uri="{FF2B5EF4-FFF2-40B4-BE49-F238E27FC236}">
+                <a16:creationId xmlns:a16="http://schemas.microsoft.com/office/drawing/2014/main" id="{8CEC41D0-CD90-604D-9421-ABA9845A448D}"/>
+              </a:ext>
+            </a:extLst>
+          </p:cNvPr>
+          <p:cNvSpPr>
+            <a:spLocks noGrp="1"/>
+          </p:cNvSpPr>
+          <p:nvPr>
+            <p:ph type="title"/>
+          </p:nvPr>
+        </p:nvSpPr>
+        <p:spPr/>
+        <p:txBody>
+          <a:bodyPr/>
+          <a:lstStyle/>
+          <a:p>
+            <a:r>
+              <a:rPr lang="en-US" dirty="0"/>
+              <a:t>Summary</a:t>
+            </a:r>
+          </a:p>
+        </p:txBody>
+      </p:sp>
+      <p:sp>
+        <p:nvSpPr>
+          <p:cNvPr id="3" name="Content Placeholder 2">
+            <a:extLst>
+              <a:ext uri="{FF2B5EF4-FFF2-40B4-BE49-F238E27FC236}">
+                <a16:creationId xmlns:a16="http://schemas.microsoft.com/office/drawing/2014/main" id="{EF6ED727-E738-BB4E-9468-91EA4903D3C0}"/>
+              </a:ext>
+            </a:extLst>
+          </p:cNvPr>
+          <p:cNvSpPr>
+            <a:spLocks noGrp="1"/>
+          </p:cNvSpPr>
+          <p:nvPr>
+            <p:ph idx="1"/>
+          </p:nvPr>
+        </p:nvSpPr>
+        <p:spPr/>
+        <p:txBody>
+          <a:bodyPr/>
+          <a:lstStyle/>
+          <a:p>
+            <a:r>
+              <a:rPr lang="en-US" dirty="0"/>
+              <a:t>The heat equation can be solved using numerical methods</a:t>
+            </a:r>
+          </a:p>
+          <a:p>
+            <a:r>
+              <a:rPr lang="en-US" dirty="0"/>
+              <a:t>Explicit or implicit time integration can be used</a:t>
+            </a:r>
+          </a:p>
+          <a:p>
+            <a:r>
+              <a:rPr lang="en-US" dirty="0"/>
+              <a:t>Spatial derivative solution methods divide the domain up into smaller pieces</a:t>
+            </a:r>
+          </a:p>
+          <a:p>
+            <a:pPr lvl="1"/>
+            <a:r>
+              <a:rPr lang="en-US" dirty="0"/>
+              <a:t>Finite difference</a:t>
+            </a:r>
+          </a:p>
+          <a:p>
+            <a:pPr lvl="1"/>
+            <a:r>
+              <a:rPr lang="en-US" dirty="0"/>
+              <a:t>Finite volume</a:t>
+            </a:r>
+          </a:p>
+          <a:p>
+            <a:pPr lvl="1"/>
+            <a:r>
+              <a:rPr lang="en-US" dirty="0"/>
+              <a:t>Finite element</a:t>
+            </a:r>
+          </a:p>
+          <a:p>
+            <a:r>
+              <a:rPr lang="en-US" dirty="0"/>
+              <a:t>Each discretization has strengths/weaknesses</a:t>
+            </a:r>
+          </a:p>
+          <a:p>
+            <a:r>
+              <a:rPr lang="en-US" dirty="0"/>
+              <a:t>Finite element is primary method for high fidelity fuel performance codes</a:t>
+            </a:r>
+          </a:p>
+        </p:txBody>
+      </p:sp>
+      <p:sp>
+        <p:nvSpPr>
+          <p:cNvPr id="4" name="Slide Number Placeholder 3">
+            <a:extLst>
+              <a:ext uri="{FF2B5EF4-FFF2-40B4-BE49-F238E27FC236}">
+                <a16:creationId xmlns:a16="http://schemas.microsoft.com/office/drawing/2014/main" id="{4CC3667D-0DF5-C145-A246-FEF9A6035D17}"/>
+              </a:ext>
+            </a:extLst>
+          </p:cNvPr>
+          <p:cNvSpPr>
+            <a:spLocks noGrp="1"/>
+          </p:cNvSpPr>
+          <p:nvPr>
+            <p:ph type="sldNum" sz="quarter" idx="12"/>
+          </p:nvPr>
+        </p:nvSpPr>
+        <p:spPr/>
+        <p:txBody>
+          <a:bodyPr/>
+          <a:lstStyle/>
+          <a:p>
+            <a:pPr>
+              <a:defRPr/>
+            </a:pPr>
+            <a:fld id="{3FF2C605-4958-CF43-AA48-80339EFDB0AF}" type="slidenum">
+              <a:rPr lang="en-US" smtClean="0"/>
+              <a:pPr>
+                <a:defRPr/>
+              </a:pPr>
+              <a:t>13</a:t>
+            </a:fld>
+            <a:endParaRPr lang="en-US"/>
+          </a:p>
+        </p:txBody>
+      </p:sp>
+    </p:spTree>
+    <p:extLst>
+      <p:ext uri="{BB962C8B-B14F-4D97-AF65-F5344CB8AC3E}">
+        <p14:creationId xmlns:p14="http://schemas.microsoft.com/office/powerpoint/2010/main" val="817537717"/>
+      </p:ext>
+    </p:extLst>
+  </p:cSld>
+  <p:clrMapOvr>
+    <a:masterClrMapping/>
+  </p:clrMapOvr>
+</p:sld>
+</file>
+
+<file path=ppt/slides/slide14.xml><?xml version="1.0" encoding="utf-8"?>
+<p:sld xmlns:a="http://schemas.openxmlformats.org/drawingml/2006/main" xmlns:r="http://schemas.openxmlformats.org/officeDocument/2006/relationships" xmlns:p="http://schemas.openxmlformats.org/presentationml/2006/main">
+  <p:cSld>
+    <p:spTree>
+      <p:nvGrpSpPr>
+        <p:cNvPr id="1" name=""/>
+        <p:cNvGrpSpPr/>
+        <p:nvPr/>
+      </p:nvGrpSpPr>
+      <p:grpSpPr>
+        <a:xfrm>
+          <a:off x="0" y="0"/>
+          <a:ext cx="0" cy="0"/>
+          <a:chOff x="0" y="0"/>
+          <a:chExt cx="0" cy="0"/>
+        </a:xfrm>
+      </p:grpSpPr>
+      <p:sp>
+        <p:nvSpPr>
+          <p:cNvPr id="2" name="Title 1">
+            <a:extLst>
+              <a:ext uri="{FF2B5EF4-FFF2-40B4-BE49-F238E27FC236}">
                 <a16:creationId xmlns:a16="http://schemas.microsoft.com/office/drawing/2014/main" id="{C6374A42-F8E4-245E-6766-9773A4E15879}"/>
               </a:ext>
             </a:extLst>
@@ -4565,21 +5105,18 @@
           <a:p>
             <a:r>
               <a:rPr lang="en-US" dirty="0"/>
-              <a:t>Problem session on Tuesday 27</a:t>
+              <a:t>Problem session on Thursday 29</a:t>
             </a:r>
             <a:r>
               <a:rPr lang="en-US" baseline="30000" dirty="0"/>
               <a:t>th</a:t>
             </a:r>
+            <a:endParaRPr lang="en-US" dirty="0"/>
+          </a:p>
+          <a:p>
             <a:r>
               <a:rPr lang="en-US" dirty="0"/>
-              <a:t> --- will be a virtual recording (on travel)</a:t>
-            </a:r>
-          </a:p>
-          <a:p>
-            <a:r>
-              <a:rPr lang="en-US" dirty="0"/>
-              <a:t>Exam on 29rd</a:t>
+              <a:t>Exam on Feb 3rd</a:t>
             </a:r>
             <a:endParaRPr lang="en-US" baseline="30000" dirty="0"/>
           </a:p>
@@ -4657,7 +5194,7 @@
               <a:pPr>
                 <a:defRPr/>
               </a:pPr>
-              <a:t>13</a:t>
+              <a:t>14</a:t>
             </a:fld>
             <a:endParaRPr lang="en-US"/>
           </a:p>
@@ -4698,7 +5235,7 @@
           <p:cNvPr id="2" name="Title 1">
             <a:extLst>
               <a:ext uri="{FF2B5EF4-FFF2-40B4-BE49-F238E27FC236}">
-                <a16:creationId xmlns:a16="http://schemas.microsoft.com/office/drawing/2014/main" id="{297947CF-EAEA-5F40-93E5-30922295C42A}"/>
+                <a16:creationId xmlns:a16="http://schemas.microsoft.com/office/drawing/2014/main" id="{816CEC25-CB9F-CD79-C886-7B2180AFA180}"/>
               </a:ext>
             </a:extLst>
           </p:cNvPr>
@@ -4715,8 +5252,67 @@
           <a:lstStyle/>
           <a:p>
             <a:r>
-              <a:rPr lang="en-US" sz="4000" dirty="0"/>
-              <a:t>Spatial discretization</a:t>
+              <a:rPr lang="en-US" dirty="0"/>
+              <a:t>Last Time</a:t>
+            </a:r>
+          </a:p>
+        </p:txBody>
+      </p:sp>
+      <p:sp>
+        <p:nvSpPr>
+          <p:cNvPr id="3" name="Content Placeholder 2">
+            <a:extLst>
+              <a:ext uri="{FF2B5EF4-FFF2-40B4-BE49-F238E27FC236}">
+                <a16:creationId xmlns:a16="http://schemas.microsoft.com/office/drawing/2014/main" id="{BF6E0E2E-B4EB-853F-902C-F39F78E72F4E}"/>
+              </a:ext>
+            </a:extLst>
+          </p:cNvPr>
+          <p:cNvSpPr>
+            <a:spLocks noGrp="1"/>
+          </p:cNvSpPr>
+          <p:nvPr>
+            <p:ph idx="1"/>
+          </p:nvPr>
+        </p:nvSpPr>
+        <p:spPr/>
+        <p:txBody>
+          <a:bodyPr/>
+          <a:lstStyle/>
+          <a:p>
+            <a:r>
+              <a:rPr lang="en-US" dirty="0"/>
+              <a:t>Axial temperature profile</a:t>
+            </a:r>
+          </a:p>
+          <a:p>
+            <a:r>
+              <a:rPr lang="en-US" dirty="0"/>
+              <a:t>Thermal operating limits</a:t>
+            </a:r>
+          </a:p>
+          <a:p>
+            <a:pPr lvl="1"/>
+            <a:r>
+              <a:rPr lang="en-US" dirty="0"/>
+              <a:t>CHF and DNBR</a:t>
+            </a:r>
+          </a:p>
+          <a:p>
+            <a:r>
+              <a:rPr lang="en-US" dirty="0"/>
+              <a:t>Phonon-based thermal conductivity</a:t>
+            </a:r>
+          </a:p>
+          <a:p>
+            <a:r>
+              <a:rPr lang="en-US" dirty="0"/>
+              <a:t>Numerical discretization</a:t>
+            </a:r>
+          </a:p>
+          <a:p>
+            <a:r>
+              <a:rPr lang="en-US" dirty="0"/>
+              <a:t>Forward/backward Euler</a:t>
             </a:r>
           </a:p>
         </p:txBody>
@@ -4724,7 +5320,7 @@
     </p:spTree>
     <p:extLst>
       <p:ext uri="{BB962C8B-B14F-4D97-AF65-F5344CB8AC3E}">
-        <p14:creationId xmlns:p14="http://schemas.microsoft.com/office/powerpoint/2010/main" val="1855067299"/>
+        <p14:creationId xmlns:p14="http://schemas.microsoft.com/office/powerpoint/2010/main" val="2239631393"/>
       </p:ext>
     </p:extLst>
   </p:cSld>
@@ -4756,6 +5352,64 @@
           <p:cNvPr id="2" name="Title 1">
             <a:extLst>
               <a:ext uri="{FF2B5EF4-FFF2-40B4-BE49-F238E27FC236}">
+                <a16:creationId xmlns:a16="http://schemas.microsoft.com/office/drawing/2014/main" id="{297947CF-EAEA-5F40-93E5-30922295C42A}"/>
+              </a:ext>
+            </a:extLst>
+          </p:cNvPr>
+          <p:cNvSpPr>
+            <a:spLocks noGrp="1"/>
+          </p:cNvSpPr>
+          <p:nvPr>
+            <p:ph type="title"/>
+          </p:nvPr>
+        </p:nvSpPr>
+        <p:spPr/>
+        <p:txBody>
+          <a:bodyPr/>
+          <a:lstStyle/>
+          <a:p>
+            <a:r>
+              <a:rPr lang="en-US" sz="4000" dirty="0"/>
+              <a:t>Spatial discretization</a:t>
+            </a:r>
+          </a:p>
+        </p:txBody>
+      </p:sp>
+    </p:spTree>
+    <p:extLst>
+      <p:ext uri="{BB962C8B-B14F-4D97-AF65-F5344CB8AC3E}">
+        <p14:creationId xmlns:p14="http://schemas.microsoft.com/office/powerpoint/2010/main" val="1855067299"/>
+      </p:ext>
+    </p:extLst>
+  </p:cSld>
+  <p:clrMapOvr>
+    <a:masterClrMapping/>
+  </p:clrMapOvr>
+</p:sld>
+</file>
+
+<file path=ppt/slides/slide4.xml><?xml version="1.0" encoding="utf-8"?>
+<p:sld xmlns:a="http://schemas.openxmlformats.org/drawingml/2006/main" xmlns:r="http://schemas.openxmlformats.org/officeDocument/2006/relationships" xmlns:p="http://schemas.openxmlformats.org/presentationml/2006/main">
+  <p:cSld>
+    <p:spTree>
+      <p:nvGrpSpPr>
+        <p:cNvPr id="1" name=""/>
+        <p:cNvGrpSpPr/>
+        <p:nvPr/>
+      </p:nvGrpSpPr>
+      <p:grpSpPr>
+        <a:xfrm>
+          <a:off x="0" y="0"/>
+          <a:ext cx="0" cy="0"/>
+          <a:chOff x="0" y="0"/>
+          <a:chExt cx="0" cy="0"/>
+        </a:xfrm>
+      </p:grpSpPr>
+      <p:sp>
+        <p:nvSpPr>
+          <p:cNvPr id="2" name="Title 1">
+            <a:extLst>
+              <a:ext uri="{FF2B5EF4-FFF2-40B4-BE49-F238E27FC236}">
                 <a16:creationId xmlns:a16="http://schemas.microsoft.com/office/drawing/2014/main" id="{29BA9FDE-E482-B34E-8135-A2DE621C9AAA}"/>
               </a:ext>
             </a:extLst>
@@ -4885,7 +5539,7 @@
               <a:pPr>
                 <a:defRPr/>
               </a:pPr>
-              <a:t>3</a:t>
+              <a:t>4</a:t>
             </a:fld>
             <a:endParaRPr lang="en-US"/>
           </a:p>
@@ -4934,7 +5588,7 @@
 </p:sld>
 </file>
 
-<file path=ppt/slides/slide4.xml><?xml version="1.0" encoding="utf-8"?>
+<file path=ppt/slides/slide5.xml><?xml version="1.0" encoding="utf-8"?>
 <p:sld xmlns:a="http://schemas.openxmlformats.org/drawingml/2006/main" xmlns:r="http://schemas.openxmlformats.org/officeDocument/2006/relationships" xmlns:p="http://schemas.openxmlformats.org/presentationml/2006/main">
   <p:cSld>
     <p:spTree>
@@ -5075,7 +5729,7 @@
               <a:pPr>
                 <a:defRPr/>
               </a:pPr>
-              <a:t>4</a:t>
+              <a:t>5</a:t>
             </a:fld>
             <a:endParaRPr lang="en-US"/>
           </a:p>
@@ -6094,7 +6748,7 @@
 </p:sld>
 </file>
 
-<file path=ppt/slides/slide5.xml><?xml version="1.0" encoding="utf-8"?>
+<file path=ppt/slides/slide6.xml><?xml version="1.0" encoding="utf-8"?>
 <p:sld xmlns:a="http://schemas.openxmlformats.org/drawingml/2006/main" xmlns:r="http://schemas.openxmlformats.org/officeDocument/2006/relationships" xmlns:p="http://schemas.openxmlformats.org/presentationml/2006/main">
   <p:cSld>
     <p:spTree>
@@ -6244,7 +6898,7 @@
               <a:pPr>
                 <a:defRPr/>
               </a:pPr>
-              <a:t>5</a:t>
+              <a:t>6</a:t>
             </a:fld>
             <a:endParaRPr lang="en-US"/>
           </a:p>
@@ -6749,7 +7403,7 @@
 </p:sld>
 </file>
 
-<file path=ppt/slides/slide6.xml><?xml version="1.0" encoding="utf-8"?>
+<file path=ppt/slides/slide7.xml><?xml version="1.0" encoding="utf-8"?>
 <p:sld xmlns:a="http://schemas.openxmlformats.org/drawingml/2006/main" xmlns:r="http://schemas.openxmlformats.org/officeDocument/2006/relationships" xmlns:p="http://schemas.openxmlformats.org/presentationml/2006/main">
   <p:cSld>
     <p:spTree>
@@ -6898,7 +7552,7 @@
               <a:pPr>
                 <a:defRPr/>
               </a:pPr>
-              <a:t>6</a:t>
+              <a:t>7</a:t>
             </a:fld>
             <a:endParaRPr lang="en-US"/>
           </a:p>
@@ -7867,7 +8521,7 @@
 </p:sld>
 </file>
 
-<file path=ppt/slides/slide7.xml><?xml version="1.0" encoding="utf-8"?>
+<file path=ppt/slides/slide8.xml><?xml version="1.0" encoding="utf-8"?>
 <p:sld xmlns:a="http://schemas.openxmlformats.org/drawingml/2006/main" xmlns:r="http://schemas.openxmlformats.org/officeDocument/2006/relationships" xmlns:p="http://schemas.openxmlformats.org/presentationml/2006/main">
   <p:cSld>
     <p:spTree>
@@ -8037,7 +8691,7 @@
               <a:pPr>
                 <a:defRPr/>
               </a:pPr>
-              <a:t>7</a:t>
+              <a:t>8</a:t>
             </a:fld>
             <a:endParaRPr lang="en-US"/>
           </a:p>
@@ -8088,7 +8742,7 @@
               </a14:hiddenLine>
             </a:ext>
             <a:ext uri="{FAA26D3D-D897-4be2-8F04-BA451C77F1D7}">
-              <ma14:placeholderFlag xmlns:ma14="http://schemas.microsoft.com/office/mac/drawingml/2011/main" xmlns="" val="1"/>
+              <ma14:placeholderFlag xmlns="" xmlns:ma14="http://schemas.microsoft.com/office/mac/drawingml/2011/main" val="1"/>
             </a:ext>
           </a:extLst>
         </p:spPr>
@@ -8400,7 +9054,7 @@
               </a14:hiddenLine>
             </a:ext>
             <a:ext uri="{FAA26D3D-D897-4be2-8F04-BA451C77F1D7}">
-              <ma14:placeholderFlag xmlns:ma14="http://schemas.microsoft.com/office/mac/drawingml/2011/main" xmlns="" val="1"/>
+              <ma14:placeholderFlag xmlns="" xmlns:ma14="http://schemas.microsoft.com/office/mac/drawingml/2011/main" val="1"/>
             </a:ext>
           </a:extLst>
         </p:spPr>
@@ -8677,7 +9331,7 @@
 </p:sld>
 </file>
 
-<file path=ppt/slides/slide8.xml><?xml version="1.0" encoding="utf-8"?>
+<file path=ppt/slides/slide9.xml><?xml version="1.0" encoding="utf-8"?>
 <p:sld xmlns:a="http://schemas.openxmlformats.org/drawingml/2006/main" xmlns:r="http://schemas.openxmlformats.org/officeDocument/2006/relationships" xmlns:p="http://schemas.openxmlformats.org/presentationml/2006/main">
   <p:cSld>
     <p:spTree>
@@ -9136,545 +9790,6 @@
     <p:extLst>
       <p:ext uri="{BB962C8B-B14F-4D97-AF65-F5344CB8AC3E}">
         <p14:creationId xmlns:p14="http://schemas.microsoft.com/office/powerpoint/2010/main" val="2708287293"/>
-      </p:ext>
-    </p:extLst>
-  </p:cSld>
-  <p:clrMapOvr>
-    <a:masterClrMapping/>
-  </p:clrMapOvr>
-</p:sld>
-</file>
-
-<file path=ppt/slides/slide9.xml><?xml version="1.0" encoding="utf-8"?>
-<p:sld xmlns:a="http://schemas.openxmlformats.org/drawingml/2006/main" xmlns:r="http://schemas.openxmlformats.org/officeDocument/2006/relationships" xmlns:p="http://schemas.openxmlformats.org/presentationml/2006/main">
-  <p:cSld>
-    <p:spTree>
-      <p:nvGrpSpPr>
-        <p:cNvPr id="1" name=""/>
-        <p:cNvGrpSpPr/>
-        <p:nvPr/>
-      </p:nvGrpSpPr>
-      <p:grpSpPr>
-        <a:xfrm>
-          <a:off x="0" y="0"/>
-          <a:ext cx="0" cy="0"/>
-          <a:chOff x="0" y="0"/>
-          <a:chExt cx="0" cy="0"/>
-        </a:xfrm>
-      </p:grpSpPr>
-      <p:sp>
-        <p:nvSpPr>
-          <p:cNvPr id="2" name="Title 1"/>
-          <p:cNvSpPr>
-            <a:spLocks noGrp="1"/>
-          </p:cNvSpPr>
-          <p:nvPr>
-            <p:ph type="title"/>
-          </p:nvPr>
-        </p:nvSpPr>
-        <p:spPr/>
-        <p:txBody>
-          <a:bodyPr/>
-          <a:lstStyle/>
-          <a:p>
-            <a:r>
-              <a:rPr lang="en-US" dirty="0"/>
-              <a:t>Numerical Approaches to Different Fuel Performance Problems</a:t>
-            </a:r>
-          </a:p>
-        </p:txBody>
-      </p:sp>
-      <p:sp>
-        <p:nvSpPr>
-          <p:cNvPr id="3" name="Pentagon 2"/>
-          <p:cNvSpPr/>
-          <p:nvPr/>
-        </p:nvSpPr>
-        <p:spPr>
-          <a:xfrm rot="16200000">
-            <a:off x="-198665" y="3771515"/>
-            <a:ext cx="4359729" cy="580572"/>
-          </a:xfrm>
-          <a:prstGeom prst="homePlate">
-            <a:avLst/>
-          </a:prstGeom>
-          <a:gradFill>
-            <a:lin ang="0" scaled="0"/>
-          </a:gradFill>
-        </p:spPr>
-        <p:style>
-          <a:lnRef idx="1">
-            <a:schemeClr val="accent2"/>
-          </a:lnRef>
-          <a:fillRef idx="3">
-            <a:schemeClr val="accent2"/>
-          </a:fillRef>
-          <a:effectRef idx="2">
-            <a:schemeClr val="accent2"/>
-          </a:effectRef>
-          <a:fontRef idx="minor">
-            <a:schemeClr val="lt1"/>
-          </a:fontRef>
-        </p:style>
-        <p:txBody>
-          <a:bodyPr rtlCol="0" anchor="ctr"/>
-          <a:lstStyle/>
-          <a:p>
-            <a:pPr algn="ctr"/>
-            <a:r>
-              <a:rPr lang="en-US" dirty="0"/>
-              <a:t>Computational cost</a:t>
-            </a:r>
-          </a:p>
-        </p:txBody>
-      </p:sp>
-      <p:sp>
-        <p:nvSpPr>
-          <p:cNvPr id="4" name="Pentagon 3"/>
-          <p:cNvSpPr/>
-          <p:nvPr/>
-        </p:nvSpPr>
-        <p:spPr>
-          <a:xfrm rot="16200000">
-            <a:off x="7893958" y="3771514"/>
-            <a:ext cx="4359729" cy="580572"/>
-          </a:xfrm>
-          <a:prstGeom prst="homePlate">
-            <a:avLst/>
-          </a:prstGeom>
-          <a:gradFill>
-            <a:lin ang="0" scaled="0"/>
-          </a:gradFill>
-        </p:spPr>
-        <p:style>
-          <a:lnRef idx="1">
-            <a:schemeClr val="accent2"/>
-          </a:lnRef>
-          <a:fillRef idx="3">
-            <a:schemeClr val="accent2"/>
-          </a:fillRef>
-          <a:effectRef idx="2">
-            <a:schemeClr val="accent2"/>
-          </a:effectRef>
-          <a:fontRef idx="minor">
-            <a:schemeClr val="lt1"/>
-          </a:fontRef>
-        </p:style>
-        <p:txBody>
-          <a:bodyPr rtlCol="0" anchor="ctr"/>
-          <a:lstStyle/>
-          <a:p>
-            <a:pPr algn="ctr"/>
-            <a:r>
-              <a:rPr lang="en-US" dirty="0"/>
-              <a:t>Accuracy</a:t>
-            </a:r>
-          </a:p>
-        </p:txBody>
-      </p:sp>
-      <p:grpSp>
-        <p:nvGrpSpPr>
-          <p:cNvPr id="5" name="Group 4"/>
-          <p:cNvGrpSpPr/>
-          <p:nvPr/>
-        </p:nvGrpSpPr>
-        <p:grpSpPr>
-          <a:xfrm>
-            <a:off x="2186593" y="1881935"/>
-            <a:ext cx="7596943" cy="1175798"/>
-            <a:chOff x="662592" y="1881935"/>
-            <a:chExt cx="7596943" cy="1175798"/>
-          </a:xfrm>
-        </p:grpSpPr>
-        <p:pic>
-          <p:nvPicPr>
-            <p:cNvPr id="6" name="Picture 5"/>
-            <p:cNvPicPr>
-              <a:picLocks noChangeAspect="1"/>
-            </p:cNvPicPr>
-            <p:nvPr/>
-          </p:nvPicPr>
-          <p:blipFill>
-            <a:blip r:embed="rId2">
-              <a:alphaModFix amt="56000"/>
-              <a:extLst>
-                <a:ext uri="{28A0092B-C50C-407E-A947-70E740481C1C}">
-                  <a14:useLocalDpi xmlns:a14="http://schemas.microsoft.com/office/drawing/2010/main" val="0"/>
-                </a:ext>
-              </a:extLst>
-            </a:blip>
-            <a:stretch>
-              <a:fillRect/>
-            </a:stretch>
-          </p:blipFill>
-          <p:spPr>
-            <a:xfrm>
-              <a:off x="662592" y="1881935"/>
-              <a:ext cx="7426552" cy="1175798"/>
-            </a:xfrm>
-            <a:prstGeom prst="rect">
-              <a:avLst/>
-            </a:prstGeom>
-            <a:ln>
-              <a:noFill/>
-            </a:ln>
-            <a:effectLst>
-              <a:outerShdw blurRad="292100" dist="139700" dir="2700000" algn="tl" rotWithShape="0">
-                <a:srgbClr val="333333">
-                  <a:alpha val="65000"/>
-                </a:srgbClr>
-              </a:outerShdw>
-            </a:effectLst>
-          </p:spPr>
-        </p:pic>
-        <p:sp>
-          <p:nvSpPr>
-            <p:cNvPr id="7" name="TextBox 6"/>
-            <p:cNvSpPr txBox="1"/>
-            <p:nvPr/>
-          </p:nvSpPr>
-          <p:spPr>
-            <a:xfrm>
-              <a:off x="747487" y="2263761"/>
-              <a:ext cx="7512048" cy="738664"/>
-            </a:xfrm>
-            <a:prstGeom prst="rect">
-              <a:avLst/>
-            </a:prstGeom>
-            <a:noFill/>
-          </p:spPr>
-          <p:txBody>
-            <a:bodyPr wrap="square" rtlCol="0">
-              <a:spAutoFit/>
-            </a:bodyPr>
-            <a:lstStyle/>
-            <a:p>
-              <a:pPr algn="ctr"/>
-              <a:r>
-                <a:rPr lang="en-US" sz="2400" b="1" dirty="0"/>
-                <a:t>Transient, full 3D</a:t>
-              </a:r>
-            </a:p>
-            <a:p>
-              <a:pPr algn="ctr"/>
-              <a:r>
-                <a:rPr lang="en-US" b="1" i="1" dirty="0">
-                  <a:solidFill>
-                    <a:srgbClr val="3154CA"/>
-                  </a:solidFill>
-                </a:rPr>
-                <a:t>FEM or FV</a:t>
-              </a:r>
-            </a:p>
-          </p:txBody>
-        </p:sp>
-      </p:grpSp>
-      <p:grpSp>
-        <p:nvGrpSpPr>
-          <p:cNvPr id="8" name="Group 7"/>
-          <p:cNvGrpSpPr/>
-          <p:nvPr/>
-        </p:nvGrpSpPr>
-        <p:grpSpPr>
-          <a:xfrm>
-            <a:off x="2271486" y="3138120"/>
-            <a:ext cx="7512048" cy="895746"/>
-            <a:chOff x="747486" y="3138120"/>
-            <a:chExt cx="7512048" cy="895746"/>
-          </a:xfrm>
-        </p:grpSpPr>
-        <p:pic>
-          <p:nvPicPr>
-            <p:cNvPr id="9" name="Picture 8" descr="2D_asisymmetric_discrete_pellet.png"/>
-            <p:cNvPicPr>
-              <a:picLocks noChangeAspect="1"/>
-            </p:cNvPicPr>
-            <p:nvPr/>
-          </p:nvPicPr>
-          <p:blipFill>
-            <a:blip r:embed="rId3">
-              <a:alphaModFix amt="60000"/>
-              <a:extLst>
-                <a:ext uri="{28A0092B-C50C-407E-A947-70E740481C1C}">
-                  <a14:useLocalDpi xmlns:a14="http://schemas.microsoft.com/office/drawing/2010/main" val="0"/>
-                </a:ext>
-              </a:extLst>
-            </a:blip>
-            <a:stretch>
-              <a:fillRect/>
-            </a:stretch>
-          </p:blipFill>
-          <p:spPr>
-            <a:xfrm>
-              <a:off x="834578" y="3138120"/>
-              <a:ext cx="7420806" cy="427052"/>
-            </a:xfrm>
-            <a:prstGeom prst="rect">
-              <a:avLst/>
-            </a:prstGeom>
-          </p:spPr>
-        </p:pic>
-        <p:sp>
-          <p:nvSpPr>
-            <p:cNvPr id="10" name="TextBox 9"/>
-            <p:cNvSpPr txBox="1"/>
-            <p:nvPr/>
-          </p:nvSpPr>
-          <p:spPr>
-            <a:xfrm>
-              <a:off x="747486" y="3202869"/>
-              <a:ext cx="7512048" cy="830997"/>
-            </a:xfrm>
-            <a:prstGeom prst="rect">
-              <a:avLst/>
-            </a:prstGeom>
-            <a:noFill/>
-          </p:spPr>
-          <p:txBody>
-            <a:bodyPr wrap="square" rtlCol="0">
-              <a:spAutoFit/>
-            </a:bodyPr>
-            <a:lstStyle/>
-            <a:p>
-              <a:pPr algn="ctr"/>
-              <a:r>
-                <a:rPr lang="en-US" sz="2400" b="1" dirty="0"/>
-                <a:t>Transient, 2D axisymmetric with discrete pellets</a:t>
-              </a:r>
-            </a:p>
-            <a:p>
-              <a:pPr algn="ctr"/>
-              <a:r>
-                <a:rPr lang="en-US" b="1" i="1" dirty="0">
-                  <a:solidFill>
-                    <a:srgbClr val="3154CA"/>
-                  </a:solidFill>
-                </a:rPr>
-                <a:t>FEM or FV</a:t>
-              </a:r>
-              <a:r>
-                <a:rPr lang="en-US" sz="2400" b="1" dirty="0">
-                  <a:solidFill>
-                    <a:srgbClr val="3154CA"/>
-                  </a:solidFill>
-                </a:rPr>
-                <a:t> </a:t>
-              </a:r>
-            </a:p>
-          </p:txBody>
-        </p:sp>
-      </p:grpSp>
-      <p:grpSp>
-        <p:nvGrpSpPr>
-          <p:cNvPr id="11" name="Group 10"/>
-          <p:cNvGrpSpPr/>
-          <p:nvPr/>
-        </p:nvGrpSpPr>
-        <p:grpSpPr>
-          <a:xfrm>
-            <a:off x="2271486" y="3868051"/>
-            <a:ext cx="7512048" cy="830997"/>
-            <a:chOff x="747486" y="3868050"/>
-            <a:chExt cx="7512048" cy="830997"/>
-          </a:xfrm>
-        </p:grpSpPr>
-        <p:pic>
-          <p:nvPicPr>
-            <p:cNvPr id="12" name="Picture 11" descr="2D_asisymmetric_smeared_pellet.png"/>
-            <p:cNvPicPr>
-              <a:picLocks noChangeAspect="1"/>
-            </p:cNvPicPr>
-            <p:nvPr/>
-          </p:nvPicPr>
-          <p:blipFill>
-            <a:blip r:embed="rId4">
-              <a:alphaModFix amt="60000"/>
-              <a:extLst>
-                <a:ext uri="{28A0092B-C50C-407E-A947-70E740481C1C}">
-                  <a14:useLocalDpi xmlns:a14="http://schemas.microsoft.com/office/drawing/2010/main" val="0"/>
-                </a:ext>
-              </a:extLst>
-            </a:blip>
-            <a:stretch>
-              <a:fillRect/>
-            </a:stretch>
-          </p:blipFill>
-          <p:spPr>
-            <a:xfrm>
-              <a:off x="834578" y="3956978"/>
-              <a:ext cx="7320636" cy="417458"/>
-            </a:xfrm>
-            <a:prstGeom prst="rect">
-              <a:avLst/>
-            </a:prstGeom>
-          </p:spPr>
-        </p:pic>
-        <p:sp>
-          <p:nvSpPr>
-            <p:cNvPr id="13" name="TextBox 12"/>
-            <p:cNvSpPr txBox="1"/>
-            <p:nvPr/>
-          </p:nvSpPr>
-          <p:spPr>
-            <a:xfrm>
-              <a:off x="747486" y="3868050"/>
-              <a:ext cx="7512048" cy="830997"/>
-            </a:xfrm>
-            <a:prstGeom prst="rect">
-              <a:avLst/>
-            </a:prstGeom>
-            <a:noFill/>
-          </p:spPr>
-          <p:txBody>
-            <a:bodyPr wrap="square" rtlCol="0">
-              <a:spAutoFit/>
-            </a:bodyPr>
-            <a:lstStyle/>
-            <a:p>
-              <a:pPr algn="ctr"/>
-              <a:r>
-                <a:rPr lang="en-US" sz="2400" b="1" dirty="0"/>
-                <a:t>Transient, 2D axisymmetric with smeared pellets</a:t>
-              </a:r>
-            </a:p>
-            <a:p>
-              <a:pPr algn="ctr"/>
-              <a:r>
-                <a:rPr lang="en-US" b="1" i="1" dirty="0">
-                  <a:solidFill>
-                    <a:srgbClr val="3154CA"/>
-                  </a:solidFill>
-                </a:rPr>
-                <a:t>FEM, FV, or FD</a:t>
-              </a:r>
-              <a:r>
-                <a:rPr lang="en-US" sz="2400" b="1" dirty="0">
-                  <a:solidFill>
-                    <a:srgbClr val="3154CA"/>
-                  </a:solidFill>
-                </a:rPr>
-                <a:t> </a:t>
-              </a:r>
-            </a:p>
-          </p:txBody>
-        </p:sp>
-      </p:grpSp>
-      <p:sp>
-        <p:nvSpPr>
-          <p:cNvPr id="14" name="TextBox 13"/>
-          <p:cNvSpPr txBox="1"/>
-          <p:nvPr/>
-        </p:nvSpPr>
-        <p:spPr>
-          <a:xfrm>
-            <a:off x="2271487" y="4594014"/>
-            <a:ext cx="7512048" cy="738664"/>
-          </a:xfrm>
-          <a:prstGeom prst="rect">
-            <a:avLst/>
-          </a:prstGeom>
-          <a:noFill/>
-        </p:spPr>
-        <p:txBody>
-          <a:bodyPr wrap="square" rtlCol="0">
-            <a:spAutoFit/>
-          </a:bodyPr>
-          <a:lstStyle/>
-          <a:p>
-            <a:pPr algn="ctr"/>
-            <a:r>
-              <a:rPr lang="en-US" sz="2400" b="1" dirty="0"/>
-              <a:t>Transient, multiple 1D slices (1.5D)</a:t>
-            </a:r>
-          </a:p>
-          <a:p>
-            <a:pPr algn="ctr"/>
-            <a:r>
-              <a:rPr lang="en-US" b="1" i="1" dirty="0">
-                <a:solidFill>
-                  <a:srgbClr val="3154CA"/>
-                </a:solidFill>
-              </a:rPr>
-              <a:t>FEM, FV, or FD</a:t>
-            </a:r>
-          </a:p>
-        </p:txBody>
-      </p:sp>
-      <p:sp>
-        <p:nvSpPr>
-          <p:cNvPr id="15" name="TextBox 14"/>
-          <p:cNvSpPr txBox="1"/>
-          <p:nvPr/>
-        </p:nvSpPr>
-        <p:spPr>
-          <a:xfrm>
-            <a:off x="2271487" y="5191336"/>
-            <a:ext cx="7512048" cy="738664"/>
-          </a:xfrm>
-          <a:prstGeom prst="rect">
-            <a:avLst/>
-          </a:prstGeom>
-          <a:noFill/>
-        </p:spPr>
-        <p:txBody>
-          <a:bodyPr wrap="square" rtlCol="0">
-            <a:spAutoFit/>
-          </a:bodyPr>
-          <a:lstStyle/>
-          <a:p>
-            <a:pPr algn="ctr"/>
-            <a:r>
-              <a:rPr lang="en-US" sz="2400" b="1" dirty="0"/>
-              <a:t>Transient, 1D</a:t>
-            </a:r>
-          </a:p>
-          <a:p>
-            <a:pPr algn="ctr"/>
-            <a:r>
-              <a:rPr lang="en-US" b="1" i="1" dirty="0">
-                <a:solidFill>
-                  <a:srgbClr val="3154CA"/>
-                </a:solidFill>
-              </a:rPr>
-              <a:t>FEM, FV, or FD</a:t>
-            </a:r>
-          </a:p>
-        </p:txBody>
-      </p:sp>
-      <p:sp>
-        <p:nvSpPr>
-          <p:cNvPr id="16" name="TextBox 15"/>
-          <p:cNvSpPr txBox="1"/>
-          <p:nvPr/>
-        </p:nvSpPr>
-        <p:spPr>
-          <a:xfrm>
-            <a:off x="2271486" y="5780002"/>
-            <a:ext cx="7512048" cy="461665"/>
-          </a:xfrm>
-          <a:prstGeom prst="rect">
-            <a:avLst/>
-          </a:prstGeom>
-          <a:noFill/>
-        </p:spPr>
-        <p:txBody>
-          <a:bodyPr wrap="square" rtlCol="0">
-            <a:spAutoFit/>
-          </a:bodyPr>
-          <a:lstStyle/>
-          <a:p>
-            <a:pPr algn="ctr"/>
-            <a:r>
-              <a:rPr lang="en-US" sz="2400" b="1" dirty="0"/>
-              <a:t>Steady state, 1D (analytical)</a:t>
-            </a:r>
-          </a:p>
-        </p:txBody>
-      </p:sp>
-    </p:spTree>
-    <p:extLst>
-      <p:ext uri="{BB962C8B-B14F-4D97-AF65-F5344CB8AC3E}">
-        <p14:creationId xmlns:p14="http://schemas.microsoft.com/office/powerpoint/2010/main" val="1629777620"/>
       </p:ext>
     </p:extLst>
   </p:cSld>
